--- a/docs/circuit-bank-2-slides.pptx
+++ b/docs/circuit-bank-2-slides.pptx
@@ -108,7 +108,7 @@
   <p:extLst>
     <p:ext uri="{521415D9-36F7-43E2-AB2F-B90AF26B5E84}">
       <p14:sectionLst xmlns:p14="http://schemas.microsoft.com/office/powerpoint/2010/main">
-        <p14:section name="Summary" id="{0e2b7c92-8d3b-edfd-4235-b2e9e365d8e9}">
+        <p14:section name="Summary" id="{04e1d55a-771c-870a-7e87-6a856c86b974}">
           <p14:sldIdLst>
             <p14:sldId id="256"/>
             <p14:sldId id="257"/>
@@ -606,7 +606,7 @@
           <a:p>
             <a:r>
               <a:rPr lang="en-US" dirty="0"/>
-              <a:t>Chen's generate-critique-count loop runs unchanged (scenario_list.py). Two of his agents are replaced because circuits can be enumerated and verified: the proposer is an enumerator over all series-parallel shapes in the difficulty band, and the critic is a script that parses, solves, canonicalises the shape, counts reduction steps and checks ranges. The circuit engine (circuit-diagram-skill) produces every figure, number and worked solution; distractors are recomputed from named student mistakes. 34 shapes exist at 3 steps with 4-6 resistors; the bank uses 30 of them; same input and seed regenerate the identical bank.</a:t>
+              <a:t>Chen's generate-critique-count loop runs unchanged (scenario_list.py). Two of his agents are replaced because circuits can be enumerated and verified: the proposer is an enumerator over all series-parallel shapes in the difficulty band, and the critic is a script that parses, solves, canonicalises the shape, counts reduction steps and checks ranges. The circuit engine (circuit-diagram-skill) produces every figure, number and worked solution; distractors are recomputed from named student mistakes. exactly 30 shapes exist at 3 steps with 5-6 resistors; the bank uses every one; same input and seed regenerate the identical bank.</a:t>
             </a:r>
             <a:endParaRPr lang="en-US" dirty="0"/>
           </a:p>
@@ -2065,7 +2065,7 @@
                   <a:schemeClr val="tx2"/>
                 </a:solidFill>
               </a:rPr>
-              <a:t>every item reduces in exactly 3 steps</a:t>
+              <a:t>every item reduces in exactly 3 steps, with 5–6 resistors</a:t>
             </a:r>
             <a:endParaRPr lang="en-US" sz="1150" dirty="0"/>
           </a:p>
@@ -2209,7 +2209,7 @@
                   <a:schemeClr val="tx2"/>
                 </a:solidFill>
               </a:rPr>
-              <a:t>each distractor is computed from one named error</a:t>
+              <a:t>three computed from one named error each, plus a decoy near the largest</a:t>
             </a:r>
             <a:endParaRPr lang="en-US" sz="1150" dirty="0"/>
           </a:p>
@@ -3438,7 +3438,7 @@
                   <a:schemeClr val="accent1"/>
                 </a:solidFill>
               </a:rPr>
-              <a:t>34</a:t>
+              <a:t>30</a:t>
             </a:r>
             <a:endParaRPr lang="en-US" sz="4400" dirty="0"/>
           </a:p>
@@ -3488,7 +3488,7 @@
                   <a:schemeClr val="tx1"/>
                 </a:solidFill>
               </a:rPr>
-              <a:t>with 4–6 resistors</a:t>
+              <a:t>with 5–6 resistors</a:t>
             </a:r>
             <a:endParaRPr lang="en-US" sz="1100" dirty="0"/>
           </a:p>
@@ -3601,7 +3601,7 @@
                   <a:schemeClr val="tx1"/>
                 </a:solidFill>
               </a:rPr>
-              <a:t>30 of those 34</a:t>
+              <a:t>every one of them</a:t>
             </a:r>
             <a:endParaRPr lang="en-US" sz="1100" dirty="0"/>
           </a:p>
@@ -3863,7 +3863,7 @@
                   <a:schemeClr val="tx1"/>
                 </a:solidFill>
               </a:rPr>
-              <a:t>One item, four computed options</a:t>
+              <a:t>One item, five computed options</a:t>
             </a:r>
             <a:endParaRPr lang="en-US" sz="1250" dirty="0"/>
           </a:p>
@@ -3927,7 +3927,7 @@
         </p:nvSpPr>
         <p:spPr>
           <a:xfrm>
-            <a:off x="3063240" y="4617720"/>
+            <a:off x="3063240" y="4572000"/>
             <a:ext cx="3017520" cy="384048"/>
           </a:xfrm>
           <a:prstGeom prst="rect">
@@ -3977,7 +3977,7 @@
         </p:nvSpPr>
         <p:spPr>
           <a:xfrm>
-            <a:off x="3063240" y="5038344"/>
+            <a:off x="3063240" y="4919472"/>
             <a:ext cx="3017520" cy="384048"/>
           </a:xfrm>
           <a:prstGeom prst="rect">
@@ -4027,7 +4027,7 @@
         </p:nvSpPr>
         <p:spPr>
           <a:xfrm>
-            <a:off x="3063240" y="5458968"/>
+            <a:off x="3063240" y="5266944"/>
             <a:ext cx="3017520" cy="384048"/>
           </a:xfrm>
           <a:prstGeom prst="rect">
@@ -4077,7 +4077,7 @@
         </p:nvSpPr>
         <p:spPr>
           <a:xfrm>
-            <a:off x="3063240" y="5879592"/>
+            <a:off x="3063240" y="5614416"/>
             <a:ext cx="3017520" cy="384048"/>
           </a:xfrm>
           <a:prstGeom prst="rect">
@@ -4096,12 +4096,62 @@
             <a:r>
               <a:rPr lang="en-US" sz="1100" b="1" dirty="0">
                 <a:solidFill>
-                  <a:schemeClr val="accent1"/>
+                  <a:schemeClr val="tx1"/>
                 </a:solidFill>
                 <a:latin typeface="Courier New" pitchFamily="34" charset="0"/>
                 <a:ea typeface="Courier New" pitchFamily="34" charset="-122"/>
                 <a:cs typeface="Courier New" pitchFamily="34" charset="-120"/>
               </a:rPr>
+              <a:t>2.40 A   </a:t>
+            </a:r>
+            <a:pPr indent="0" marL="0">
+              <a:buNone/>
+            </a:pPr>
+            <a:r>
+              <a:rPr lang="en-US" sz="1100" i="1" dirty="0">
+                <a:solidFill>
+                  <a:schemeClr val="tx2"/>
+                </a:solidFill>
+              </a:rPr>
+              <a:t>decoy near the largest option</a:t>
+            </a:r>
+            <a:endParaRPr lang="en-US" sz="1100" dirty="0"/>
+          </a:p>
+        </p:txBody>
+      </p:sp>
+      <p:sp>
+        <p:nvSpPr>
+          <p:cNvPr id="51" name="option 5"/>
+          <p:cNvSpPr txBox="1"/>
+          <p:nvPr/>
+        </p:nvSpPr>
+        <p:spPr>
+          <a:xfrm>
+            <a:off x="3063240" y="5961888"/>
+            <a:ext cx="3017520" cy="384048"/>
+          </a:xfrm>
+          <a:prstGeom prst="rect">
+            <a:avLst/>
+          </a:prstGeom>
+          <a:noFill/>
+          <a:ln/>
+        </p:spPr>
+        <p:txBody>
+          <a:bodyPr wrap="square" lIns="0" tIns="0" rIns="0" bIns="0" rtlCol="0" anchor="ctr"/>
+          <a:lstStyle/>
+          <a:p>
+            <a:pPr indent="0" marL="0">
+              <a:buNone/>
+            </a:pPr>
+            <a:r>
+              <a:rPr lang="en-US" sz="1100" b="1" dirty="0">
+                <a:solidFill>
+                  <a:schemeClr val="accent1"/>
+                </a:solidFill>
+                <a:latin typeface="Courier New" pitchFamily="34" charset="0"/>
+                <a:ea typeface="Courier New" pitchFamily="34" charset="-122"/>
+                <a:cs typeface="Courier New" pitchFamily="34" charset="-120"/>
+              </a:rPr>
               <a:t>2.00 A   </a:t>
             </a:r>
             <a:pPr indent="0" marL="0">
@@ -4121,7 +4171,7 @@
       </p:sp>
       <p:sp>
         <p:nvSpPr>
-          <p:cNvPr id="51" name="critic heading"/>
+          <p:cNvPr id="52" name="critic heading"/>
           <p:cNvSpPr txBox="1"/>
           <p:nvPr/>
         </p:nvSpPr>
@@ -4157,7 +4207,7 @@
       </p:sp>
       <p:sp>
         <p:nvSpPr>
-          <p:cNvPr id="52" name="rdot 1"/>
+          <p:cNvPr id="53" name="rdot 1"/>
           <p:cNvSpPr/>
           <p:nvPr/>
         </p:nvSpPr>
@@ -4182,7 +4232,7 @@
       </p:sp>
       <p:sp>
         <p:nvSpPr>
-          <p:cNvPr id="53" name="reason 1"/>
+          <p:cNvPr id="54" name="reason 1"/>
           <p:cNvSpPr txBox="1"/>
           <p:nvPr/>
         </p:nvSpPr>
@@ -4229,7 +4279,7 @@
       </p:sp>
       <p:sp>
         <p:nvSpPr>
-          <p:cNvPr id="54" name="rdot 2"/>
+          <p:cNvPr id="55" name="rdot 2"/>
           <p:cNvSpPr/>
           <p:nvPr/>
         </p:nvSpPr>
@@ -4254,7 +4304,7 @@
       </p:sp>
       <p:sp>
         <p:nvSpPr>
-          <p:cNvPr id="55" name="reason 2"/>
+          <p:cNvPr id="56" name="reason 2"/>
           <p:cNvSpPr txBox="1"/>
           <p:nvPr/>
         </p:nvSpPr>
@@ -4304,7 +4354,7 @@
       </p:sp>
       <p:sp>
         <p:nvSpPr>
-          <p:cNvPr id="56" name="rdot 3"/>
+          <p:cNvPr id="57" name="rdot 3"/>
           <p:cNvSpPr/>
           <p:nvPr/>
         </p:nvSpPr>
@@ -4329,7 +4379,7 @@
       </p:sp>
       <p:sp>
         <p:nvSpPr>
-          <p:cNvPr id="57" name="reason 3"/>
+          <p:cNvPr id="58" name="reason 3"/>
           <p:cNvSpPr txBox="1"/>
           <p:nvPr/>
         </p:nvSpPr>
@@ -4376,7 +4426,7 @@
       </p:sp>
       <p:sp>
         <p:nvSpPr>
-          <p:cNvPr id="58" name="rdot 4"/>
+          <p:cNvPr id="59" name="rdot 4"/>
           <p:cNvSpPr/>
           <p:nvPr/>
         </p:nvSpPr>
@@ -4401,7 +4451,7 @@
       </p:sp>
       <p:sp>
         <p:nvSpPr>
-          <p:cNvPr id="59" name="reason 4"/>
+          <p:cNvPr id="60" name="reason 4"/>
           <p:cNvSpPr txBox="1"/>
           <p:nvPr/>
         </p:nvSpPr>
